--- a/LastFM_Community_Detection.pptx
+++ b/LastFM_Community_Detection.pptx
@@ -2922,7 +2922,7 @@
           </a:prstGeom>
           <a:extLst>
             <a:ext uri="{C572A759-6A51-4108-AA02-DFA0A04FC94B}">
-              <ma14:wrappingTextBoxFlag xmlns:ma14="http://schemas.microsoft.com/office/mac/drawingml/2011/main" xmlns="" val="0"/>
+              <ma14:wrappingTextBoxFlag xmlns="" xmlns:ma14="http://schemas.microsoft.com/office/mac/drawingml/2011/main" val="0"/>
             </a:ext>
           </a:extLst>
         </p:spPr>
@@ -3047,7 +3047,7 @@
           </a:prstGeom>
           <a:extLst>
             <a:ext uri="{C572A759-6A51-4108-AA02-DFA0A04FC94B}">
-              <ma14:wrappingTextBoxFlag xmlns:ma14="http://schemas.microsoft.com/office/mac/drawingml/2011/main" xmlns="" val="0"/>
+              <ma14:wrappingTextBoxFlag xmlns="" xmlns:ma14="http://schemas.microsoft.com/office/mac/drawingml/2011/main" val="0"/>
             </a:ext>
           </a:extLst>
         </p:spPr>
@@ -3125,7 +3125,7 @@
           </a:prstGeom>
           <a:extLst>
             <a:ext uri="{C572A759-6A51-4108-AA02-DFA0A04FC94B}">
-              <ma14:wrappingTextBoxFlag xmlns:ma14="http://schemas.microsoft.com/office/mac/drawingml/2011/main" xmlns="" val="0"/>
+              <ma14:wrappingTextBoxFlag xmlns="" xmlns:ma14="http://schemas.microsoft.com/office/mac/drawingml/2011/main" val="0"/>
             </a:ext>
           </a:extLst>
         </p:spPr>
@@ -4986,7 +4986,7 @@
         </p:nvSpPr>
         <p:spPr>
           <a:xfrm>
-            <a:off x="457200" y="274320"/>
+            <a:off x="548640" y="3326211"/>
             <a:ext cx="8229600" cy="777240"/>
           </a:xfrm>
           <a:prstGeom prst="rect">
@@ -4999,10 +4999,27 @@
           <a:bodyPr wrap="square" lIns="0" tIns="0" rIns="0" bIns="0" rtlCol="0" anchor="ctr"/>
           <a:lstStyle/>
           <a:p>
-            <a:pPr marL="0" indent="0">
+            <a:pPr marL="0" indent="0" algn="l">
               <a:buNone/>
             </a:pPr>
-            <a:endParaRPr lang="en-US" sz="2800" dirty="0"/>
+            <a:r>
+              <a:rPr lang="en-US" sz="1400" dirty="0"/>
+              <a:t>By-</a:t>
+            </a:r>
+            <a:br>
+              <a:rPr lang="en-US" sz="1400" dirty="0"/>
+            </a:br>
+            <a:r>
+              <a:rPr lang="en-US" sz="1400" dirty="0"/>
+              <a:t>Soumya 23bcb7020</a:t>
+            </a:r>
+            <a:br>
+              <a:rPr lang="en-US" sz="1400" dirty="0"/>
+            </a:br>
+            <a:r>
+              <a:rPr lang="en-US" sz="1400" dirty="0"/>
+              <a:t>Hiranmayi 23bcb7022</a:t>
+            </a:r>
           </a:p>
         </p:txBody>
       </p:sp>
@@ -5026,7 +5043,7 @@
           </a:prstGeom>
           <a:extLst>
             <a:ext uri="{C572A759-6A51-4108-AA02-DFA0A04FC94B}">
-              <ma14:wrappingTextBoxFlag xmlns:ma14="http://schemas.microsoft.com/office/mac/drawingml/2011/main" xmlns="" val="0"/>
+              <ma14:wrappingTextBoxFlag xmlns="" xmlns:ma14="http://schemas.microsoft.com/office/mac/drawingml/2011/main" val="0"/>
             </a:ext>
           </a:extLst>
         </p:spPr>
@@ -5472,7 +5489,7 @@
           </a:prstGeom>
           <a:extLst>
             <a:ext uri="{C572A759-6A51-4108-AA02-DFA0A04FC94B}">
-              <ma14:wrappingTextBoxFlag xmlns:ma14="http://schemas.microsoft.com/office/mac/drawingml/2011/main" xmlns="" val="0"/>
+              <ma14:wrappingTextBoxFlag xmlns="" xmlns:ma14="http://schemas.microsoft.com/office/mac/drawingml/2011/main" val="0"/>
             </a:ext>
           </a:extLst>
         </p:spPr>
@@ -7125,7 +7142,7 @@
           </a:prstGeom>
           <a:extLst>
             <a:ext uri="{C572A759-6A51-4108-AA02-DFA0A04FC94B}">
-              <ma14:wrappingTextBoxFlag xmlns:ma14="http://schemas.microsoft.com/office/mac/drawingml/2011/main" xmlns="" val="0"/>
+              <ma14:wrappingTextBoxFlag xmlns="" xmlns:ma14="http://schemas.microsoft.com/office/mac/drawingml/2011/main" val="0"/>
             </a:ext>
           </a:extLst>
         </p:spPr>
@@ -12808,7 +12825,7 @@
           </a:prstGeom>
           <a:extLst>
             <a:ext uri="{C572A759-6A51-4108-AA02-DFA0A04FC94B}">
-              <ma14:wrappingTextBoxFlag xmlns:ma14="http://schemas.microsoft.com/office/mac/drawingml/2011/main" xmlns="" val="0"/>
+              <ma14:wrappingTextBoxFlag xmlns="" xmlns:ma14="http://schemas.microsoft.com/office/mac/drawingml/2011/main" val="0"/>
             </a:ext>
           </a:extLst>
         </p:spPr>
@@ -13098,7 +13115,7 @@
           </a:prstGeom>
           <a:extLst>
             <a:ext uri="{C572A759-6A51-4108-AA02-DFA0A04FC94B}">
-              <ma14:wrappingTextBoxFlag xmlns:ma14="http://schemas.microsoft.com/office/mac/drawingml/2011/main" xmlns="" val="0"/>
+              <ma14:wrappingTextBoxFlag xmlns="" xmlns:ma14="http://schemas.microsoft.com/office/mac/drawingml/2011/main" val="0"/>
             </a:ext>
           </a:extLst>
         </p:spPr>
@@ -13558,7 +13575,7 @@
           </a:prstGeom>
           <a:extLst>
             <a:ext uri="{C572A759-6A51-4108-AA02-DFA0A04FC94B}">
-              <ma14:wrappingTextBoxFlag xmlns:ma14="http://schemas.microsoft.com/office/mac/drawingml/2011/main" xmlns="" val="0"/>
+              <ma14:wrappingTextBoxFlag xmlns="" xmlns:ma14="http://schemas.microsoft.com/office/mac/drawingml/2011/main" val="0"/>
             </a:ext>
           </a:extLst>
         </p:spPr>
@@ -14206,7 +14223,7 @@
           </a:prstGeom>
           <a:extLst>
             <a:ext uri="{C572A759-6A51-4108-AA02-DFA0A04FC94B}">
-              <ma14:wrappingTextBoxFlag xmlns:ma14="http://schemas.microsoft.com/office/mac/drawingml/2011/main" xmlns="" val="0"/>
+              <ma14:wrappingTextBoxFlag xmlns="" xmlns:ma14="http://schemas.microsoft.com/office/mac/drawingml/2011/main" val="0"/>
             </a:ext>
           </a:extLst>
         </p:spPr>
@@ -14949,7 +14966,7 @@
           </a:prstGeom>
           <a:extLst>
             <a:ext uri="{C572A759-6A51-4108-AA02-DFA0A04FC94B}">
-              <ma14:wrappingTextBoxFlag xmlns:ma14="http://schemas.microsoft.com/office/mac/drawingml/2011/main" xmlns="" val="0"/>
+              <ma14:wrappingTextBoxFlag xmlns="" xmlns:ma14="http://schemas.microsoft.com/office/mac/drawingml/2011/main" val="0"/>
             </a:ext>
           </a:extLst>
         </p:spPr>
@@ -16815,7 +16832,7 @@
           </a:prstGeom>
           <a:extLst>
             <a:ext uri="{C572A759-6A51-4108-AA02-DFA0A04FC94B}">
-              <ma14:wrappingTextBoxFlag xmlns:ma14="http://schemas.microsoft.com/office/mac/drawingml/2011/main" xmlns="" val="0"/>
+              <ma14:wrappingTextBoxFlag xmlns="" xmlns:ma14="http://schemas.microsoft.com/office/mac/drawingml/2011/main" val="0"/>
             </a:ext>
           </a:extLst>
         </p:spPr>
@@ -17744,7 +17761,7 @@
           </a:prstGeom>
           <a:extLst>
             <a:ext uri="{C572A759-6A51-4108-AA02-DFA0A04FC94B}">
-              <ma14:wrappingTextBoxFlag xmlns:ma14="http://schemas.microsoft.com/office/mac/drawingml/2011/main" xmlns="" val="0"/>
+              <ma14:wrappingTextBoxFlag xmlns="" xmlns:ma14="http://schemas.microsoft.com/office/mac/drawingml/2011/main" val="0"/>
             </a:ext>
           </a:extLst>
         </p:spPr>
@@ -18677,7 +18694,7 @@
           </a:prstGeom>
           <a:extLst>
             <a:ext uri="{C572A759-6A51-4108-AA02-DFA0A04FC94B}">
-              <ma14:wrappingTextBoxFlag xmlns:ma14="http://schemas.microsoft.com/office/mac/drawingml/2011/main" xmlns="" val="0"/>
+              <ma14:wrappingTextBoxFlag xmlns="" xmlns:ma14="http://schemas.microsoft.com/office/mac/drawingml/2011/main" val="0"/>
             </a:ext>
           </a:extLst>
         </p:spPr>
@@ -19782,7 +19799,7 @@
           </a:prstGeom>
           <a:extLst>
             <a:ext uri="{C572A759-6A51-4108-AA02-DFA0A04FC94B}">
-              <ma14:wrappingTextBoxFlag xmlns:ma14="http://schemas.microsoft.com/office/mac/drawingml/2011/main" xmlns="" val="0"/>
+              <ma14:wrappingTextBoxFlag xmlns="" xmlns:ma14="http://schemas.microsoft.com/office/mac/drawingml/2011/main" val="0"/>
             </a:ext>
           </a:extLst>
         </p:spPr>
@@ -20602,7 +20619,7 @@
           </a:prstGeom>
           <a:extLst>
             <a:ext uri="{C572A759-6A51-4108-AA02-DFA0A04FC94B}">
-              <ma14:wrappingTextBoxFlag xmlns:ma14="http://schemas.microsoft.com/office/mac/drawingml/2011/main" xmlns="" val="0"/>
+              <ma14:wrappingTextBoxFlag xmlns="" xmlns:ma14="http://schemas.microsoft.com/office/mac/drawingml/2011/main" val="0"/>
             </a:ext>
           </a:extLst>
         </p:spPr>
@@ -20805,7 +20822,7 @@
           </a:prstGeom>
           <a:extLst>
             <a:ext uri="{C572A759-6A51-4108-AA02-DFA0A04FC94B}">
-              <ma14:wrappingTextBoxFlag xmlns:ma14="http://schemas.microsoft.com/office/mac/drawingml/2011/main" xmlns="" val="0"/>
+              <ma14:wrappingTextBoxFlag xmlns="" xmlns:ma14="http://schemas.microsoft.com/office/mac/drawingml/2011/main" val="0"/>
             </a:ext>
           </a:extLst>
         </p:spPr>
